--- a/备选资产/结构图/研究方法摘要-001/example.pptx
+++ b/备选资产/结构图/研究方法摘要-001/example.pptx
@@ -2,13 +2,13 @@
 <file path=ppt/presentation.xml><?xml version="1.0" encoding="utf-8"?>
 <p:presentation xmlns:p="http://schemas.openxmlformats.org/presentationml/2006/main">
   <p:sldMasterIdLst>
-    <p:sldMasterId xmlns:r="http://schemas.openxmlformats.org/officeDocument/2006/relationships" id="2147483648" r:id="R9f4491523761439a"/>
+    <p:sldMasterId xmlns:r="http://schemas.openxmlformats.org/officeDocument/2006/relationships" id="2147483648" r:id="R290317cd617e4101"/>
   </p:sldMasterIdLst>
   <p:notesMasterIdLst>
-    <p:notesMasterId xmlns:r="http://schemas.openxmlformats.org/officeDocument/2006/relationships" r:id="Rc6f59217ec2740e0"/>
+    <p:notesMasterId xmlns:r="http://schemas.openxmlformats.org/officeDocument/2006/relationships" r:id="R124af45d71ef4594"/>
   </p:notesMasterIdLst>
   <p:sldIdLst>
-    <p:sldId xmlns:r="http://schemas.openxmlformats.org/officeDocument/2006/relationships" id="256" r:id="R2bf16f16f8774b11"/>
+    <p:sldId xmlns:r="http://schemas.openxmlformats.org/officeDocument/2006/relationships" id="256" r:id="R1c073538dc424f3c"/>
   </p:sldIdLst>
   <p:sldSz cx="12192000" cy="6858000"/>
   <p:notesSz cx="6858000" cy="9144000"/>
@@ -506,7 +506,7 @@
   </p:cSld>
   <p:clrMap bg1="lt1" tx1="dk1" bg2="lt2" tx2="dk2" accent1="accent1" accent2="accent2" accent3="accent3" accent4="accent4" accent5="accent5" accent6="accent6" hlink="hlink" folHlink="folHlink"/>
   <p:sldLayoutIdLst>
-    <p:sldLayoutId xmlns:r="http://schemas.openxmlformats.org/officeDocument/2006/relationships" id="2147483649" r:id="R51fd3ad3446246c3"/>
+    <p:sldLayoutId xmlns:r="http://schemas.openxmlformats.org/officeDocument/2006/relationships" id="2147483649" r:id="R4f29aab23a2542dc"/>
   </p:sldLayoutIdLst>
   <p:txStyles>
     <p:titleStyle>
@@ -1057,7 +1057,7 @@
           <p:cNvPr id="25" name="">
             <a:extLst xmlns:a="http://schemas.openxmlformats.org/drawingml/2006/main">
               <a:ext uri="{FF2B5EF4-FFF2-40B4-BE49-F238E27FC236}">
-                <a16:creationId xmlns:a16="http://schemas.microsoft.com/office/drawing/2014/main" id="{EC5137A6-5E58-4830-9828-5BE4B13207C7}"/>
+                <a16:creationId xmlns:a16="http://schemas.microsoft.com/office/drawing/2014/main" id="{55D37725-9B18-4ADF-B732-3554C294DA1E}"/>
               </a:ext>
             </a:extLst>
           </p:cNvPr>
@@ -1115,7 +1115,7 @@
           <p:cNvPr id="2" name="">
             <a:extLst xmlns:a="http://schemas.openxmlformats.org/drawingml/2006/main">
               <a:ext uri="{FF2B5EF4-FFF2-40B4-BE49-F238E27FC236}">
-                <a16:creationId xmlns:a16="http://schemas.microsoft.com/office/drawing/2014/main" id="{0305486D-ED4D-45CE-BB78-7581F2239D5D}"/>
+                <a16:creationId xmlns:a16="http://schemas.microsoft.com/office/drawing/2014/main" id="{F34366BB-DEFF-4F6C-930E-5E16A9420C33}"/>
               </a:ext>
             </a:extLst>
           </p:cNvPr>
@@ -1173,7 +1173,7 @@
           <p:cNvPr id="3" name="">
             <a:extLst xmlns:a="http://schemas.openxmlformats.org/drawingml/2006/main">
               <a:ext uri="{FF2B5EF4-FFF2-40B4-BE49-F238E27FC236}">
-                <a16:creationId xmlns:a16="http://schemas.microsoft.com/office/drawing/2014/main" id="{B1DE7171-C687-4A15-910D-A39BEBFE349B}"/>
+                <a16:creationId xmlns:a16="http://schemas.microsoft.com/office/drawing/2014/main" id="{4AC24A24-BCD3-46EB-828E-E062FC2F0A0C}"/>
               </a:ext>
             </a:extLst>
           </p:cNvPr>
@@ -1206,7 +1206,7 @@
           <p:cNvPr id="4" name="">
             <a:extLst xmlns:a="http://schemas.openxmlformats.org/drawingml/2006/main">
               <a:ext uri="{FF2B5EF4-FFF2-40B4-BE49-F238E27FC236}">
-                <a16:creationId xmlns:a16="http://schemas.microsoft.com/office/drawing/2014/main" id="{610F3812-1680-4537-BEE6-6DB55B7CCEC1}"/>
+                <a16:creationId xmlns:a16="http://schemas.microsoft.com/office/drawing/2014/main" id="{F571C39C-8811-4729-95EF-160877BB6FFF}"/>
               </a:ext>
             </a:extLst>
           </p:cNvPr>
@@ -1264,7 +1264,7 @@
           <p:cNvPr id="5" name="">
             <a:extLst xmlns:a="http://schemas.openxmlformats.org/drawingml/2006/main">
               <a:ext uri="{FF2B5EF4-FFF2-40B4-BE49-F238E27FC236}">
-                <a16:creationId xmlns:a16="http://schemas.microsoft.com/office/drawing/2014/main" id="{C8EF14AD-3BAF-4549-B1AD-F79B373F2838}"/>
+                <a16:creationId xmlns:a16="http://schemas.microsoft.com/office/drawing/2014/main" id="{A1BFC931-56D7-4923-893A-50F61DA3B8A8}"/>
               </a:ext>
             </a:extLst>
           </p:cNvPr>
@@ -1319,10 +1319,10 @@
       </p:sp>
       <p:sp>
         <p:nvSpPr>
-          <p:cNvPr id="6" name="">
+          <p:cNvPr id="6" name="PPAGENT_QA|parent=research-sample">
             <a:extLst xmlns:a="http://schemas.openxmlformats.org/drawingml/2006/main">
               <a:ext uri="{FF2B5EF4-FFF2-40B4-BE49-F238E27FC236}">
-                <a16:creationId xmlns:a16="http://schemas.microsoft.com/office/drawing/2014/main" id="{2E2CBF25-F774-407E-AB51-5C5764370A2D}"/>
+                <a16:creationId xmlns:a16="http://schemas.microsoft.com/office/drawing/2014/main" id="{AD62FBC8-57FA-4FBE-8FA7-D9BEB94D8732}"/>
               </a:ext>
             </a:extLst>
           </p:cNvPr>
@@ -1404,10 +1404,10 @@
       </p:sp>
       <p:sp>
         <p:nvSpPr>
-          <p:cNvPr id="7" name="">
+          <p:cNvPr id="7" name="PPAGENT_CONNECTOR|from=research-sample|fromSide=right|to=research-response|toSide=left">
             <a:extLst xmlns:a="http://schemas.openxmlformats.org/drawingml/2006/main">
               <a:ext uri="{FF2B5EF4-FFF2-40B4-BE49-F238E27FC236}">
-                <a16:creationId xmlns:a16="http://schemas.microsoft.com/office/drawing/2014/main" id="{C6EB1BAE-AB4F-485F-8C6E-EFFBCFE9E659}"/>
+                <a16:creationId xmlns:a16="http://schemas.microsoft.com/office/drawing/2014/main" id="{FADD88B7-4C84-49B7-97F6-5A1860DC0F6C}"/>
               </a:ext>
             </a:extLst>
           </p:cNvPr>
@@ -1417,7 +1417,7 @@
           <p:nvPr/>
         </p:nvSpPr>
         <p:spPr>
-          <a:xfrm xmlns:a="http://schemas.openxmlformats.org/drawingml/2006/main" flipV="0">
+          <a:xfrm xmlns:a="http://schemas.openxmlformats.org/drawingml/2006/main" flipH="0" flipV="0">
             <a:off x="8591550" y="2276475"/>
             <a:ext cx="857250" cy="0"/>
           </a:xfrm>
@@ -1435,10 +1435,10 @@
       </p:sp>
       <p:sp>
         <p:nvSpPr>
-          <p:cNvPr id="8" name="">
+          <p:cNvPr id="8" name="PPAGENT_QA|parent=research-response">
             <a:extLst xmlns:a="http://schemas.openxmlformats.org/drawingml/2006/main">
               <a:ext uri="{FF2B5EF4-FFF2-40B4-BE49-F238E27FC236}">
-                <a16:creationId xmlns:a16="http://schemas.microsoft.com/office/drawing/2014/main" id="{38C4F9E6-580F-43A1-99E8-45068EBBC648}"/>
+                <a16:creationId xmlns:a16="http://schemas.microsoft.com/office/drawing/2014/main" id="{3D3DE848-CD04-4925-808E-31BEBF548644}"/>
               </a:ext>
             </a:extLst>
           </p:cNvPr>
@@ -1524,10 +1524,10 @@
       </p:sp>
       <p:sp>
         <p:nvSpPr>
-          <p:cNvPr id="9" name="">
+          <p:cNvPr id="9" name="PPAGENT_QA|parent=research-dimension-0|domains=research-dimension-cards">
             <a:extLst xmlns:a="http://schemas.openxmlformats.org/drawingml/2006/main">
               <a:ext uri="{FF2B5EF4-FFF2-40B4-BE49-F238E27FC236}">
-                <a16:creationId xmlns:a16="http://schemas.microsoft.com/office/drawing/2014/main" id="{24639373-8891-48D1-A8B2-BDE7A3E222E4}"/>
+                <a16:creationId xmlns:a16="http://schemas.microsoft.com/office/drawing/2014/main" id="{22817266-E422-43E6-963D-78C49BA27FC2}"/>
               </a:ext>
             </a:extLst>
           </p:cNvPr>
@@ -1568,7 +1568,7 @@
           <p:cNvPr id="10" name="">
             <a:extLst xmlns:a="http://schemas.openxmlformats.org/drawingml/2006/main">
               <a:ext uri="{FF2B5EF4-FFF2-40B4-BE49-F238E27FC236}">
-                <a16:creationId xmlns:a16="http://schemas.microsoft.com/office/drawing/2014/main" id="{3CDCB719-8321-42D0-8EAB-8F9D8A8C5BCE}"/>
+                <a16:creationId xmlns:a16="http://schemas.microsoft.com/office/drawing/2014/main" id="{228594F6-7D4E-4C70-AE94-E04E1479A710}"/>
               </a:ext>
             </a:extLst>
           </p:cNvPr>
@@ -1588,64 +1588,6 @@
           <a:solidFill xmlns:a="http://schemas.openxmlformats.org/drawingml/2006/main">
             <a:srgbClr val="F6D8C0"/>
           </a:solidFill>
-          <a:ln xmlns:a="http://schemas.openxmlformats.org/drawingml/2006/main" w="0">
-            <a:noFill/>
-            <a:prstDash val="solid"/>
-          </a:ln>
-        </p:spPr>
-        <p:txBody>
-          <a:bodyPr xmlns:a="http://schemas.openxmlformats.org/drawingml/2006/main" lIns="114300" tIns="76200" rIns="114300" bIns="76200" anchor="ctr">
-            <a:normAutofit fontScale="100000"/>
-          </a:bodyPr>
-          <a:lstStyle xmlns:a="http://schemas.openxmlformats.org/drawingml/2006/main"/>
-          <a:p xmlns:a="http://schemas.openxmlformats.org/drawingml/2006/main">
-            <a:pPr algn="ctr">
-              <a:defRPr sz="1500" b="1">
-                <a:solidFill>
-                  <a:srgbClr val="A5613B"/>
-                </a:solidFill>
-                <a:latin typeface="Microsoft YaHei"/>
-                <a:ea typeface="Microsoft YaHei"/>
-                <a:cs typeface="Microsoft YaHei"/>
-              </a:defRPr>
-            </a:pPr>
-            <a:r>
-              <a:rPr sz="1500" b="1">
-                <a:solidFill>
-                  <a:srgbClr val="A5613B"/>
-                </a:solidFill>
-                <a:latin typeface="Microsoft YaHei"/>
-                <a:ea typeface="Microsoft YaHei"/>
-                <a:cs typeface="Microsoft YaHei"/>
-              </a:rPr>
-              <a:t>1</a:t>
-            </a:r>
-          </a:p>
-        </p:txBody>
-      </p:sp>
-      <p:sp>
-        <p:nvSpPr>
-          <p:cNvPr id="11" name="">
-            <a:extLst xmlns:a="http://schemas.openxmlformats.org/drawingml/2006/main">
-              <a:ext uri="{FF2B5EF4-FFF2-40B4-BE49-F238E27FC236}">
-                <a16:creationId xmlns:a16="http://schemas.microsoft.com/office/drawing/2014/main" id="{818224BE-BD14-4909-8924-176273AE512E}"/>
-              </a:ext>
-            </a:extLst>
-          </p:cNvPr>
-          <p:cNvSpPr>
-            <a:spLocks xmlns:a="http://schemas.openxmlformats.org/drawingml/2006/main" noGrp="1"/>
-          </p:cNvSpPr>
-          <p:nvPr/>
-        </p:nvSpPr>
-        <p:spPr>
-          <a:xfrm xmlns:a="http://schemas.openxmlformats.org/drawingml/2006/main">
-            <a:off x="819150" y="4533900"/>
-            <a:ext cx="2295525" cy="400050"/>
-          </a:xfrm>
-          <a:prstGeom xmlns:a="http://schemas.openxmlformats.org/drawingml/2006/main" prst="rect">
-            <a:avLst/>
-          </a:prstGeom>
-          <a:noFill xmlns:a="http://schemas.openxmlformats.org/drawingml/2006/main"/>
           <a:ln xmlns:a="http://schemas.openxmlformats.org/drawingml/2006/main" w="0">
             <a:noFill/>
             <a:prstDash val="solid"/>
@@ -1660,7 +1602,7 @@
             <a:pPr algn="ctr">
               <a:defRPr sz="1500" b="1">
                 <a:solidFill>
-                  <a:srgbClr val="6A3F2A"/>
+                  <a:srgbClr val="A5613B"/>
                 </a:solidFill>
                 <a:latin typeface="Microsoft YaHei"/>
                 <a:ea typeface="Microsoft YaHei"/>
@@ -1670,23 +1612,23 @@
             <a:r>
               <a:rPr sz="1500" b="1">
                 <a:solidFill>
-                  <a:srgbClr val="6A3F2A"/>
+                  <a:srgbClr val="A5613B"/>
                 </a:solidFill>
                 <a:latin typeface="Microsoft YaHei"/>
                 <a:ea typeface="Microsoft YaHei"/>
                 <a:cs typeface="Microsoft YaHei"/>
               </a:rPr>
-              <a:t>研究对象</a:t>
+              <a:t>1</a:t>
             </a:r>
           </a:p>
         </p:txBody>
       </p:sp>
       <p:sp>
         <p:nvSpPr>
-          <p:cNvPr id="12" name="">
+          <p:cNvPr id="11" name="">
             <a:extLst xmlns:a="http://schemas.openxmlformats.org/drawingml/2006/main">
               <a:ext uri="{FF2B5EF4-FFF2-40B4-BE49-F238E27FC236}">
-                <a16:creationId xmlns:a16="http://schemas.microsoft.com/office/drawing/2014/main" id="{1A429F51-761C-4FE9-BD19-E8BD2D0BF672}"/>
+                <a16:creationId xmlns:a16="http://schemas.microsoft.com/office/drawing/2014/main" id="{B6905663-7542-4A92-9A3E-9317DDACB4A3}"/>
               </a:ext>
             </a:extLst>
           </p:cNvPr>
@@ -1697,6 +1639,64 @@
         </p:nvSpPr>
         <p:spPr>
           <a:xfrm xmlns:a="http://schemas.openxmlformats.org/drawingml/2006/main">
+            <a:off x="819150" y="4533900"/>
+            <a:ext cx="2295525" cy="400050"/>
+          </a:xfrm>
+          <a:prstGeom xmlns:a="http://schemas.openxmlformats.org/drawingml/2006/main" prst="rect">
+            <a:avLst/>
+          </a:prstGeom>
+          <a:noFill xmlns:a="http://schemas.openxmlformats.org/drawingml/2006/main"/>
+          <a:ln xmlns:a="http://schemas.openxmlformats.org/drawingml/2006/main" w="0">
+            <a:noFill/>
+            <a:prstDash val="solid"/>
+          </a:ln>
+        </p:spPr>
+        <p:txBody>
+          <a:bodyPr xmlns:a="http://schemas.openxmlformats.org/drawingml/2006/main" lIns="0" tIns="0" rIns="0" bIns="0" anchor="ctr">
+            <a:normAutofit fontScale="100000"/>
+          </a:bodyPr>
+          <a:lstStyle xmlns:a="http://schemas.openxmlformats.org/drawingml/2006/main"/>
+          <a:p xmlns:a="http://schemas.openxmlformats.org/drawingml/2006/main">
+            <a:pPr algn="ctr">
+              <a:defRPr sz="1500" b="1">
+                <a:solidFill>
+                  <a:srgbClr val="6A3F2A"/>
+                </a:solidFill>
+                <a:latin typeface="Microsoft YaHei"/>
+                <a:ea typeface="Microsoft YaHei"/>
+                <a:cs typeface="Microsoft YaHei"/>
+              </a:defRPr>
+            </a:pPr>
+            <a:r>
+              <a:rPr sz="1500" b="1">
+                <a:solidFill>
+                  <a:srgbClr val="6A3F2A"/>
+                </a:solidFill>
+                <a:latin typeface="Microsoft YaHei"/>
+                <a:ea typeface="Microsoft YaHei"/>
+                <a:cs typeface="Microsoft YaHei"/>
+              </a:rPr>
+              <a:t>研究对象</a:t>
+            </a:r>
+          </a:p>
+        </p:txBody>
+      </p:sp>
+      <p:sp>
+        <p:nvSpPr>
+          <p:cNvPr id="12" name="">
+            <a:extLst xmlns:a="http://schemas.openxmlformats.org/drawingml/2006/main">
+              <a:ext uri="{FF2B5EF4-FFF2-40B4-BE49-F238E27FC236}">
+                <a16:creationId xmlns:a16="http://schemas.microsoft.com/office/drawing/2014/main" id="{11F48C1B-F5BB-46EE-8350-1A998571492F}"/>
+              </a:ext>
+            </a:extLst>
+          </p:cNvPr>
+          <p:cNvSpPr>
+            <a:spLocks xmlns:a="http://schemas.openxmlformats.org/drawingml/2006/main" noGrp="1"/>
+          </p:cNvSpPr>
+          <p:nvPr/>
+        </p:nvSpPr>
+        <p:spPr>
+          <a:xfrm xmlns:a="http://schemas.openxmlformats.org/drawingml/2006/main">
             <a:off x="819150" y="5048250"/>
             <a:ext cx="2295525" cy="895350"/>
           </a:xfrm>
@@ -1716,7 +1716,7 @@
           <a:lstStyle xmlns:a="http://schemas.openxmlformats.org/drawingml/2006/main"/>
           <a:p xmlns:a="http://schemas.openxmlformats.org/drawingml/2006/main">
             <a:pPr algn="l">
-              <a:defRPr sz="1125" b="0">
+              <a:defRPr sz="1200" b="0">
                 <a:solidFill>
                   <a:srgbClr val="5B463A"/>
                 </a:solidFill>
@@ -1726,7 +1726,7 @@
               </a:defRPr>
             </a:pPr>
             <a:r>
-              <a:rPr sz="1125" b="0">
+              <a:rPr sz="1200" b="0">
                 <a:solidFill>
                   <a:srgbClr val="5B463A"/>
                 </a:solidFill>
@@ -1741,10 +1741,10 @@
       </p:sp>
       <p:sp>
         <p:nvSpPr>
-          <p:cNvPr id="13" name="">
+          <p:cNvPr id="13" name="PPAGENT_QA|parent=research-dimension-1|domains=research-dimension-cards">
             <a:extLst xmlns:a="http://schemas.openxmlformats.org/drawingml/2006/main">
               <a:ext uri="{FF2B5EF4-FFF2-40B4-BE49-F238E27FC236}">
-                <a16:creationId xmlns:a16="http://schemas.microsoft.com/office/drawing/2014/main" id="{633CF325-0AEF-4F6E-B4F2-7ADF8965E199}"/>
+                <a16:creationId xmlns:a16="http://schemas.microsoft.com/office/drawing/2014/main" id="{36CEDCBB-2D5D-4F3D-AC2E-9026A626E23B}"/>
               </a:ext>
             </a:extLst>
           </p:cNvPr>
@@ -1785,7 +1785,7 @@
           <p:cNvPr id="14" name="">
             <a:extLst xmlns:a="http://schemas.openxmlformats.org/drawingml/2006/main">
               <a:ext uri="{FF2B5EF4-FFF2-40B4-BE49-F238E27FC236}">
-                <a16:creationId xmlns:a16="http://schemas.microsoft.com/office/drawing/2014/main" id="{88555591-C732-46F2-AE88-27BBDBB3E32A}"/>
+                <a16:creationId xmlns:a16="http://schemas.microsoft.com/office/drawing/2014/main" id="{8E92E917-0431-4EEB-8012-9FB53E37081F}"/>
               </a:ext>
             </a:extLst>
           </p:cNvPr>
@@ -1805,64 +1805,6 @@
           <a:solidFill xmlns:a="http://schemas.openxmlformats.org/drawingml/2006/main">
             <a:srgbClr val="F6D8C0"/>
           </a:solidFill>
-          <a:ln xmlns:a="http://schemas.openxmlformats.org/drawingml/2006/main" w="0">
-            <a:noFill/>
-            <a:prstDash val="solid"/>
-          </a:ln>
-        </p:spPr>
-        <p:txBody>
-          <a:bodyPr xmlns:a="http://schemas.openxmlformats.org/drawingml/2006/main" lIns="114300" tIns="76200" rIns="114300" bIns="76200" anchor="ctr">
-            <a:normAutofit fontScale="100000"/>
-          </a:bodyPr>
-          <a:lstStyle xmlns:a="http://schemas.openxmlformats.org/drawingml/2006/main"/>
-          <a:p xmlns:a="http://schemas.openxmlformats.org/drawingml/2006/main">
-            <a:pPr algn="ctr">
-              <a:defRPr sz="1500" b="1">
-                <a:solidFill>
-                  <a:srgbClr val="A5613B"/>
-                </a:solidFill>
-                <a:latin typeface="Microsoft YaHei"/>
-                <a:ea typeface="Microsoft YaHei"/>
-                <a:cs typeface="Microsoft YaHei"/>
-              </a:defRPr>
-            </a:pPr>
-            <a:r>
-              <a:rPr sz="1500" b="1">
-                <a:solidFill>
-                  <a:srgbClr val="A5613B"/>
-                </a:solidFill>
-                <a:latin typeface="Microsoft YaHei"/>
-                <a:ea typeface="Microsoft YaHei"/>
-                <a:cs typeface="Microsoft YaHei"/>
-              </a:rPr>
-              <a:t>2</a:t>
-            </a:r>
-          </a:p>
-        </p:txBody>
-      </p:sp>
-      <p:sp>
-        <p:nvSpPr>
-          <p:cNvPr id="15" name="">
-            <a:extLst xmlns:a="http://schemas.openxmlformats.org/drawingml/2006/main">
-              <a:ext uri="{FF2B5EF4-FFF2-40B4-BE49-F238E27FC236}">
-                <a16:creationId xmlns:a16="http://schemas.microsoft.com/office/drawing/2014/main" id="{2F813C35-22B3-4DF8-A585-0C4611A69E56}"/>
-              </a:ext>
-            </a:extLst>
-          </p:cNvPr>
-          <p:cNvSpPr>
-            <a:spLocks xmlns:a="http://schemas.openxmlformats.org/drawingml/2006/main" noGrp="1"/>
-          </p:cNvSpPr>
-          <p:nvPr/>
-        </p:nvSpPr>
-        <p:spPr>
-          <a:xfrm xmlns:a="http://schemas.openxmlformats.org/drawingml/2006/main">
-            <a:off x="3571875" y="4533900"/>
-            <a:ext cx="2295525" cy="400050"/>
-          </a:xfrm>
-          <a:prstGeom xmlns:a="http://schemas.openxmlformats.org/drawingml/2006/main" prst="rect">
-            <a:avLst/>
-          </a:prstGeom>
-          <a:noFill xmlns:a="http://schemas.openxmlformats.org/drawingml/2006/main"/>
           <a:ln xmlns:a="http://schemas.openxmlformats.org/drawingml/2006/main" w="0">
             <a:noFill/>
             <a:prstDash val="solid"/>
@@ -1877,7 +1819,7 @@
             <a:pPr algn="ctr">
               <a:defRPr sz="1500" b="1">
                 <a:solidFill>
-                  <a:srgbClr val="6A3F2A"/>
+                  <a:srgbClr val="A5613B"/>
                 </a:solidFill>
                 <a:latin typeface="Microsoft YaHei"/>
                 <a:ea typeface="Microsoft YaHei"/>
@@ -1887,23 +1829,23 @@
             <a:r>
               <a:rPr sz="1500" b="1">
                 <a:solidFill>
-                  <a:srgbClr val="6A3F2A"/>
+                  <a:srgbClr val="A5613B"/>
                 </a:solidFill>
                 <a:latin typeface="Microsoft YaHei"/>
                 <a:ea typeface="Microsoft YaHei"/>
                 <a:cs typeface="Microsoft YaHei"/>
               </a:rPr>
-              <a:t>成立年限</a:t>
+              <a:t>2</a:t>
             </a:r>
           </a:p>
         </p:txBody>
       </p:sp>
       <p:sp>
         <p:nvSpPr>
-          <p:cNvPr id="16" name="">
+          <p:cNvPr id="15" name="">
             <a:extLst xmlns:a="http://schemas.openxmlformats.org/drawingml/2006/main">
               <a:ext uri="{FF2B5EF4-FFF2-40B4-BE49-F238E27FC236}">
-                <a16:creationId xmlns:a16="http://schemas.microsoft.com/office/drawing/2014/main" id="{6A5118EC-4D42-4CDE-89A7-5F595802F63C}"/>
+                <a16:creationId xmlns:a16="http://schemas.microsoft.com/office/drawing/2014/main" id="{B25C1753-7EBE-458F-89B5-34033AA8B1C5}"/>
               </a:ext>
             </a:extLst>
           </p:cNvPr>
@@ -1914,6 +1856,64 @@
         </p:nvSpPr>
         <p:spPr>
           <a:xfrm xmlns:a="http://schemas.openxmlformats.org/drawingml/2006/main">
+            <a:off x="3571875" y="4533900"/>
+            <a:ext cx="2295525" cy="400050"/>
+          </a:xfrm>
+          <a:prstGeom xmlns:a="http://schemas.openxmlformats.org/drawingml/2006/main" prst="rect">
+            <a:avLst/>
+          </a:prstGeom>
+          <a:noFill xmlns:a="http://schemas.openxmlformats.org/drawingml/2006/main"/>
+          <a:ln xmlns:a="http://schemas.openxmlformats.org/drawingml/2006/main" w="0">
+            <a:noFill/>
+            <a:prstDash val="solid"/>
+          </a:ln>
+        </p:spPr>
+        <p:txBody>
+          <a:bodyPr xmlns:a="http://schemas.openxmlformats.org/drawingml/2006/main" lIns="0" tIns="0" rIns="0" bIns="0" anchor="ctr">
+            <a:normAutofit fontScale="100000"/>
+          </a:bodyPr>
+          <a:lstStyle xmlns:a="http://schemas.openxmlformats.org/drawingml/2006/main"/>
+          <a:p xmlns:a="http://schemas.openxmlformats.org/drawingml/2006/main">
+            <a:pPr algn="ctr">
+              <a:defRPr sz="1500" b="1">
+                <a:solidFill>
+                  <a:srgbClr val="6A3F2A"/>
+                </a:solidFill>
+                <a:latin typeface="Microsoft YaHei"/>
+                <a:ea typeface="Microsoft YaHei"/>
+                <a:cs typeface="Microsoft YaHei"/>
+              </a:defRPr>
+            </a:pPr>
+            <a:r>
+              <a:rPr sz="1500" b="1">
+                <a:solidFill>
+                  <a:srgbClr val="6A3F2A"/>
+                </a:solidFill>
+                <a:latin typeface="Microsoft YaHei"/>
+                <a:ea typeface="Microsoft YaHei"/>
+                <a:cs typeface="Microsoft YaHei"/>
+              </a:rPr>
+              <a:t>成立年限</a:t>
+            </a:r>
+          </a:p>
+        </p:txBody>
+      </p:sp>
+      <p:sp>
+        <p:nvSpPr>
+          <p:cNvPr id="16" name="">
+            <a:extLst xmlns:a="http://schemas.openxmlformats.org/drawingml/2006/main">
+              <a:ext uri="{FF2B5EF4-FFF2-40B4-BE49-F238E27FC236}">
+                <a16:creationId xmlns:a16="http://schemas.microsoft.com/office/drawing/2014/main" id="{50718D63-0C86-4DE0-84E3-55A228B817FF}"/>
+              </a:ext>
+            </a:extLst>
+          </p:cNvPr>
+          <p:cNvSpPr>
+            <a:spLocks xmlns:a="http://schemas.openxmlformats.org/drawingml/2006/main" noGrp="1"/>
+          </p:cNvSpPr>
+          <p:nvPr/>
+        </p:nvSpPr>
+        <p:spPr>
+          <a:xfrm xmlns:a="http://schemas.openxmlformats.org/drawingml/2006/main">
             <a:off x="3571875" y="5048250"/>
             <a:ext cx="2295525" cy="895350"/>
           </a:xfrm>
@@ -1933,7 +1933,7 @@
           <a:lstStyle xmlns:a="http://schemas.openxmlformats.org/drawingml/2006/main"/>
           <a:p xmlns:a="http://schemas.openxmlformats.org/drawingml/2006/main">
             <a:pPr algn="l">
-              <a:defRPr sz="1125" b="0">
+              <a:defRPr sz="1200" b="0">
                 <a:solidFill>
                   <a:srgbClr val="5B463A"/>
                 </a:solidFill>
@@ -1943,7 +1943,7 @@
               </a:defRPr>
             </a:pPr>
             <a:r>
-              <a:rPr sz="1125" b="0">
+              <a:rPr sz="1200" b="0">
                 <a:solidFill>
                   <a:srgbClr val="5B463A"/>
                 </a:solidFill>
@@ -1958,10 +1958,10 @@
       </p:sp>
       <p:sp>
         <p:nvSpPr>
-          <p:cNvPr id="17" name="">
+          <p:cNvPr id="17" name="PPAGENT_QA|parent=research-dimension-2|domains=research-dimension-cards">
             <a:extLst xmlns:a="http://schemas.openxmlformats.org/drawingml/2006/main">
               <a:ext uri="{FF2B5EF4-FFF2-40B4-BE49-F238E27FC236}">
-                <a16:creationId xmlns:a16="http://schemas.microsoft.com/office/drawing/2014/main" id="{96695A2C-FBD5-4290-A37B-2696A5E6F668}"/>
+                <a16:creationId xmlns:a16="http://schemas.microsoft.com/office/drawing/2014/main" id="{FAFBF044-D430-4421-BCED-AAC6F570B85E}"/>
               </a:ext>
             </a:extLst>
           </p:cNvPr>
@@ -2002,7 +2002,7 @@
           <p:cNvPr id="18" name="">
             <a:extLst xmlns:a="http://schemas.openxmlformats.org/drawingml/2006/main">
               <a:ext uri="{FF2B5EF4-FFF2-40B4-BE49-F238E27FC236}">
-                <a16:creationId xmlns:a16="http://schemas.microsoft.com/office/drawing/2014/main" id="{B3B2CC35-6848-476A-87DD-8E53F2D845E9}"/>
+                <a16:creationId xmlns:a16="http://schemas.microsoft.com/office/drawing/2014/main" id="{59B57536-4578-45CB-BE64-A740E73E73FA}"/>
               </a:ext>
             </a:extLst>
           </p:cNvPr>
@@ -2022,64 +2022,6 @@
           <a:solidFill xmlns:a="http://schemas.openxmlformats.org/drawingml/2006/main">
             <a:srgbClr val="F6D8C0"/>
           </a:solidFill>
-          <a:ln xmlns:a="http://schemas.openxmlformats.org/drawingml/2006/main" w="0">
-            <a:noFill/>
-            <a:prstDash val="solid"/>
-          </a:ln>
-        </p:spPr>
-        <p:txBody>
-          <a:bodyPr xmlns:a="http://schemas.openxmlformats.org/drawingml/2006/main" lIns="114300" tIns="76200" rIns="114300" bIns="76200" anchor="ctr">
-            <a:normAutofit fontScale="100000"/>
-          </a:bodyPr>
-          <a:lstStyle xmlns:a="http://schemas.openxmlformats.org/drawingml/2006/main"/>
-          <a:p xmlns:a="http://schemas.openxmlformats.org/drawingml/2006/main">
-            <a:pPr algn="ctr">
-              <a:defRPr sz="1500" b="1">
-                <a:solidFill>
-                  <a:srgbClr val="A5613B"/>
-                </a:solidFill>
-                <a:latin typeface="Microsoft YaHei"/>
-                <a:ea typeface="Microsoft YaHei"/>
-                <a:cs typeface="Microsoft YaHei"/>
-              </a:defRPr>
-            </a:pPr>
-            <a:r>
-              <a:rPr sz="1500" b="1">
-                <a:solidFill>
-                  <a:srgbClr val="A5613B"/>
-                </a:solidFill>
-                <a:latin typeface="Microsoft YaHei"/>
-                <a:ea typeface="Microsoft YaHei"/>
-                <a:cs typeface="Microsoft YaHei"/>
-              </a:rPr>
-              <a:t>3</a:t>
-            </a:r>
-          </a:p>
-        </p:txBody>
-      </p:sp>
-      <p:sp>
-        <p:nvSpPr>
-          <p:cNvPr id="19" name="">
-            <a:extLst xmlns:a="http://schemas.openxmlformats.org/drawingml/2006/main">
-              <a:ext uri="{FF2B5EF4-FFF2-40B4-BE49-F238E27FC236}">
-                <a16:creationId xmlns:a16="http://schemas.microsoft.com/office/drawing/2014/main" id="{5A190B11-88E3-4EB1-A94F-60FF72B71B4D}"/>
-              </a:ext>
-            </a:extLst>
-          </p:cNvPr>
-          <p:cNvSpPr>
-            <a:spLocks xmlns:a="http://schemas.openxmlformats.org/drawingml/2006/main" noGrp="1"/>
-          </p:cNvSpPr>
-          <p:nvPr/>
-        </p:nvSpPr>
-        <p:spPr>
-          <a:xfrm xmlns:a="http://schemas.openxmlformats.org/drawingml/2006/main">
-            <a:off x="6324600" y="4533900"/>
-            <a:ext cx="2295525" cy="400050"/>
-          </a:xfrm>
-          <a:prstGeom xmlns:a="http://schemas.openxmlformats.org/drawingml/2006/main" prst="rect">
-            <a:avLst/>
-          </a:prstGeom>
-          <a:noFill xmlns:a="http://schemas.openxmlformats.org/drawingml/2006/main"/>
           <a:ln xmlns:a="http://schemas.openxmlformats.org/drawingml/2006/main" w="0">
             <a:noFill/>
             <a:prstDash val="solid"/>
@@ -2094,7 +2036,7 @@
             <a:pPr algn="ctr">
               <a:defRPr sz="1500" b="1">
                 <a:solidFill>
-                  <a:srgbClr val="6A3F2A"/>
+                  <a:srgbClr val="A5613B"/>
                 </a:solidFill>
                 <a:latin typeface="Microsoft YaHei"/>
                 <a:ea typeface="Microsoft YaHei"/>
@@ -2104,23 +2046,23 @@
             <a:r>
               <a:rPr sz="1500" b="1">
                 <a:solidFill>
-                  <a:srgbClr val="6A3F2A"/>
+                  <a:srgbClr val="A5613B"/>
                 </a:solidFill>
                 <a:latin typeface="Microsoft YaHei"/>
                 <a:ea typeface="Microsoft YaHei"/>
                 <a:cs typeface="Microsoft YaHei"/>
               </a:rPr>
-              <a:t>收入来源</a:t>
+              <a:t>3</a:t>
             </a:r>
           </a:p>
         </p:txBody>
       </p:sp>
       <p:sp>
         <p:nvSpPr>
-          <p:cNvPr id="20" name="">
+          <p:cNvPr id="19" name="">
             <a:extLst xmlns:a="http://schemas.openxmlformats.org/drawingml/2006/main">
               <a:ext uri="{FF2B5EF4-FFF2-40B4-BE49-F238E27FC236}">
-                <a16:creationId xmlns:a16="http://schemas.microsoft.com/office/drawing/2014/main" id="{A15D2962-DB12-4060-A737-5112795FA8C3}"/>
+                <a16:creationId xmlns:a16="http://schemas.microsoft.com/office/drawing/2014/main" id="{B4413DDF-9A34-4CEF-98BF-45B0F7C36EE9}"/>
               </a:ext>
             </a:extLst>
           </p:cNvPr>
@@ -2131,6 +2073,64 @@
         </p:nvSpPr>
         <p:spPr>
           <a:xfrm xmlns:a="http://schemas.openxmlformats.org/drawingml/2006/main">
+            <a:off x="6324600" y="4533900"/>
+            <a:ext cx="2295525" cy="400050"/>
+          </a:xfrm>
+          <a:prstGeom xmlns:a="http://schemas.openxmlformats.org/drawingml/2006/main" prst="rect">
+            <a:avLst/>
+          </a:prstGeom>
+          <a:noFill xmlns:a="http://schemas.openxmlformats.org/drawingml/2006/main"/>
+          <a:ln xmlns:a="http://schemas.openxmlformats.org/drawingml/2006/main" w="0">
+            <a:noFill/>
+            <a:prstDash val="solid"/>
+          </a:ln>
+        </p:spPr>
+        <p:txBody>
+          <a:bodyPr xmlns:a="http://schemas.openxmlformats.org/drawingml/2006/main" lIns="0" tIns="0" rIns="0" bIns="0" anchor="ctr">
+            <a:normAutofit fontScale="100000"/>
+          </a:bodyPr>
+          <a:lstStyle xmlns:a="http://schemas.openxmlformats.org/drawingml/2006/main"/>
+          <a:p xmlns:a="http://schemas.openxmlformats.org/drawingml/2006/main">
+            <a:pPr algn="ctr">
+              <a:defRPr sz="1500" b="1">
+                <a:solidFill>
+                  <a:srgbClr val="6A3F2A"/>
+                </a:solidFill>
+                <a:latin typeface="Microsoft YaHei"/>
+                <a:ea typeface="Microsoft YaHei"/>
+                <a:cs typeface="Microsoft YaHei"/>
+              </a:defRPr>
+            </a:pPr>
+            <a:r>
+              <a:rPr sz="1500" b="1">
+                <a:solidFill>
+                  <a:srgbClr val="6A3F2A"/>
+                </a:solidFill>
+                <a:latin typeface="Microsoft YaHei"/>
+                <a:ea typeface="Microsoft YaHei"/>
+                <a:cs typeface="Microsoft YaHei"/>
+              </a:rPr>
+              <a:t>收入来源</a:t>
+            </a:r>
+          </a:p>
+        </p:txBody>
+      </p:sp>
+      <p:sp>
+        <p:nvSpPr>
+          <p:cNvPr id="20" name="">
+            <a:extLst xmlns:a="http://schemas.openxmlformats.org/drawingml/2006/main">
+              <a:ext uri="{FF2B5EF4-FFF2-40B4-BE49-F238E27FC236}">
+                <a16:creationId xmlns:a16="http://schemas.microsoft.com/office/drawing/2014/main" id="{40108667-D95D-41C9-AA7F-67C1CA93400A}"/>
+              </a:ext>
+            </a:extLst>
+          </p:cNvPr>
+          <p:cNvSpPr>
+            <a:spLocks xmlns:a="http://schemas.openxmlformats.org/drawingml/2006/main" noGrp="1"/>
+          </p:cNvSpPr>
+          <p:nvPr/>
+        </p:nvSpPr>
+        <p:spPr>
+          <a:xfrm xmlns:a="http://schemas.openxmlformats.org/drawingml/2006/main">
             <a:off x="6324600" y="5048250"/>
             <a:ext cx="2295525" cy="895350"/>
           </a:xfrm>
@@ -2150,7 +2150,7 @@
           <a:lstStyle xmlns:a="http://schemas.openxmlformats.org/drawingml/2006/main"/>
           <a:p xmlns:a="http://schemas.openxmlformats.org/drawingml/2006/main">
             <a:pPr algn="l">
-              <a:defRPr sz="1125" b="0">
+              <a:defRPr sz="1200" b="0">
                 <a:solidFill>
                   <a:srgbClr val="5B463A"/>
                 </a:solidFill>
@@ -2160,7 +2160,7 @@
               </a:defRPr>
             </a:pPr>
             <a:r>
-              <a:rPr sz="1125" b="0">
+              <a:rPr sz="1200" b="0">
                 <a:solidFill>
                   <a:srgbClr val="5B463A"/>
                 </a:solidFill>
@@ -2175,10 +2175,10 @@
       </p:sp>
       <p:sp>
         <p:nvSpPr>
-          <p:cNvPr id="21" name="">
+          <p:cNvPr id="21" name="PPAGENT_QA|parent=research-dimension-3|domains=research-dimension-cards">
             <a:extLst xmlns:a="http://schemas.openxmlformats.org/drawingml/2006/main">
               <a:ext uri="{FF2B5EF4-FFF2-40B4-BE49-F238E27FC236}">
-                <a16:creationId xmlns:a16="http://schemas.microsoft.com/office/drawing/2014/main" id="{16E440CB-6AF5-43F9-9A21-435AAEF5DEB4}"/>
+                <a16:creationId xmlns:a16="http://schemas.microsoft.com/office/drawing/2014/main" id="{EF1CE9A7-EDA2-46DF-B81C-681D8A577BF9}"/>
               </a:ext>
             </a:extLst>
           </p:cNvPr>
@@ -2219,7 +2219,7 @@
           <p:cNvPr id="22" name="">
             <a:extLst xmlns:a="http://schemas.openxmlformats.org/drawingml/2006/main">
               <a:ext uri="{FF2B5EF4-FFF2-40B4-BE49-F238E27FC236}">
-                <a16:creationId xmlns:a16="http://schemas.microsoft.com/office/drawing/2014/main" id="{400F2786-5F7F-4B3F-9987-354D71BC636D}"/>
+                <a16:creationId xmlns:a16="http://schemas.microsoft.com/office/drawing/2014/main" id="{EE9804B6-603A-44C5-B3BE-260C311DC880}"/>
               </a:ext>
             </a:extLst>
           </p:cNvPr>
@@ -2239,64 +2239,6 @@
           <a:solidFill xmlns:a="http://schemas.openxmlformats.org/drawingml/2006/main">
             <a:srgbClr val="F6D8C0"/>
           </a:solidFill>
-          <a:ln xmlns:a="http://schemas.openxmlformats.org/drawingml/2006/main" w="0">
-            <a:noFill/>
-            <a:prstDash val="solid"/>
-          </a:ln>
-        </p:spPr>
-        <p:txBody>
-          <a:bodyPr xmlns:a="http://schemas.openxmlformats.org/drawingml/2006/main" lIns="114300" tIns="76200" rIns="114300" bIns="76200" anchor="ctr">
-            <a:normAutofit fontScale="100000"/>
-          </a:bodyPr>
-          <a:lstStyle xmlns:a="http://schemas.openxmlformats.org/drawingml/2006/main"/>
-          <a:p xmlns:a="http://schemas.openxmlformats.org/drawingml/2006/main">
-            <a:pPr algn="ctr">
-              <a:defRPr sz="1500" b="1">
-                <a:solidFill>
-                  <a:srgbClr val="A5613B"/>
-                </a:solidFill>
-                <a:latin typeface="Microsoft YaHei"/>
-                <a:ea typeface="Microsoft YaHei"/>
-                <a:cs typeface="Microsoft YaHei"/>
-              </a:defRPr>
-            </a:pPr>
-            <a:r>
-              <a:rPr sz="1500" b="1">
-                <a:solidFill>
-                  <a:srgbClr val="A5613B"/>
-                </a:solidFill>
-                <a:latin typeface="Microsoft YaHei"/>
-                <a:ea typeface="Microsoft YaHei"/>
-                <a:cs typeface="Microsoft YaHei"/>
-              </a:rPr>
-              <a:t>4</a:t>
-            </a:r>
-          </a:p>
-        </p:txBody>
-      </p:sp>
-      <p:sp>
-        <p:nvSpPr>
-          <p:cNvPr id="23" name="">
-            <a:extLst xmlns:a="http://schemas.openxmlformats.org/drawingml/2006/main">
-              <a:ext uri="{FF2B5EF4-FFF2-40B4-BE49-F238E27FC236}">
-                <a16:creationId xmlns:a16="http://schemas.microsoft.com/office/drawing/2014/main" id="{0141E044-4F72-444B-85DB-DCCF946B8DAF}"/>
-              </a:ext>
-            </a:extLst>
-          </p:cNvPr>
-          <p:cNvSpPr>
-            <a:spLocks xmlns:a="http://schemas.openxmlformats.org/drawingml/2006/main" noGrp="1"/>
-          </p:cNvSpPr>
-          <p:nvPr/>
-        </p:nvSpPr>
-        <p:spPr>
-          <a:xfrm xmlns:a="http://schemas.openxmlformats.org/drawingml/2006/main">
-            <a:off x="9077325" y="4533900"/>
-            <a:ext cx="2295525" cy="400050"/>
-          </a:xfrm>
-          <a:prstGeom xmlns:a="http://schemas.openxmlformats.org/drawingml/2006/main" prst="rect">
-            <a:avLst/>
-          </a:prstGeom>
-          <a:noFill xmlns:a="http://schemas.openxmlformats.org/drawingml/2006/main"/>
           <a:ln xmlns:a="http://schemas.openxmlformats.org/drawingml/2006/main" w="0">
             <a:noFill/>
             <a:prstDash val="solid"/>
@@ -2311,7 +2253,7 @@
             <a:pPr algn="ctr">
               <a:defRPr sz="1500" b="1">
                 <a:solidFill>
-                  <a:srgbClr val="6A3F2A"/>
+                  <a:srgbClr val="A5613B"/>
                 </a:solidFill>
                 <a:latin typeface="Microsoft YaHei"/>
                 <a:ea typeface="Microsoft YaHei"/>
@@ -2321,23 +2263,23 @@
             <a:r>
               <a:rPr sz="1500" b="1">
                 <a:solidFill>
-                  <a:srgbClr val="6A3F2A"/>
+                  <a:srgbClr val="A5613B"/>
                 </a:solidFill>
                 <a:latin typeface="Microsoft YaHei"/>
                 <a:ea typeface="Microsoft YaHei"/>
                 <a:cs typeface="Microsoft YaHei"/>
               </a:rPr>
-              <a:t>偏差检验</a:t>
+              <a:t>4</a:t>
             </a:r>
           </a:p>
         </p:txBody>
       </p:sp>
       <p:sp>
         <p:nvSpPr>
-          <p:cNvPr id="24" name="">
+          <p:cNvPr id="23" name="">
             <a:extLst xmlns:a="http://schemas.openxmlformats.org/drawingml/2006/main">
               <a:ext uri="{FF2B5EF4-FFF2-40B4-BE49-F238E27FC236}">
-                <a16:creationId xmlns:a16="http://schemas.microsoft.com/office/drawing/2014/main" id="{009D2E23-A1BB-471E-A6BA-F475CB1194D6}"/>
+                <a16:creationId xmlns:a16="http://schemas.microsoft.com/office/drawing/2014/main" id="{C0297AC3-3B6F-4B02-9C49-0E06B1819285}"/>
               </a:ext>
             </a:extLst>
           </p:cNvPr>
@@ -2348,6 +2290,64 @@
         </p:nvSpPr>
         <p:spPr>
           <a:xfrm xmlns:a="http://schemas.openxmlformats.org/drawingml/2006/main">
+            <a:off x="9077325" y="4533900"/>
+            <a:ext cx="2295525" cy="400050"/>
+          </a:xfrm>
+          <a:prstGeom xmlns:a="http://schemas.openxmlformats.org/drawingml/2006/main" prst="rect">
+            <a:avLst/>
+          </a:prstGeom>
+          <a:noFill xmlns:a="http://schemas.openxmlformats.org/drawingml/2006/main"/>
+          <a:ln xmlns:a="http://schemas.openxmlformats.org/drawingml/2006/main" w="0">
+            <a:noFill/>
+            <a:prstDash val="solid"/>
+          </a:ln>
+        </p:spPr>
+        <p:txBody>
+          <a:bodyPr xmlns:a="http://schemas.openxmlformats.org/drawingml/2006/main" lIns="0" tIns="0" rIns="0" bIns="0" anchor="ctr">
+            <a:normAutofit fontScale="100000"/>
+          </a:bodyPr>
+          <a:lstStyle xmlns:a="http://schemas.openxmlformats.org/drawingml/2006/main"/>
+          <a:p xmlns:a="http://schemas.openxmlformats.org/drawingml/2006/main">
+            <a:pPr algn="ctr">
+              <a:defRPr sz="1500" b="1">
+                <a:solidFill>
+                  <a:srgbClr val="6A3F2A"/>
+                </a:solidFill>
+                <a:latin typeface="Microsoft YaHei"/>
+                <a:ea typeface="Microsoft YaHei"/>
+                <a:cs typeface="Microsoft YaHei"/>
+              </a:defRPr>
+            </a:pPr>
+            <a:r>
+              <a:rPr sz="1500" b="1">
+                <a:solidFill>
+                  <a:srgbClr val="6A3F2A"/>
+                </a:solidFill>
+                <a:latin typeface="Microsoft YaHei"/>
+                <a:ea typeface="Microsoft YaHei"/>
+                <a:cs typeface="Microsoft YaHei"/>
+              </a:rPr>
+              <a:t>偏差检验</a:t>
+            </a:r>
+          </a:p>
+        </p:txBody>
+      </p:sp>
+      <p:sp>
+        <p:nvSpPr>
+          <p:cNvPr id="24" name="">
+            <a:extLst xmlns:a="http://schemas.openxmlformats.org/drawingml/2006/main">
+              <a:ext uri="{FF2B5EF4-FFF2-40B4-BE49-F238E27FC236}">
+                <a16:creationId xmlns:a16="http://schemas.microsoft.com/office/drawing/2014/main" id="{D3BFC59A-3D2D-4E11-8B98-E79D87F4E9CF}"/>
+              </a:ext>
+            </a:extLst>
+          </p:cNvPr>
+          <p:cNvSpPr>
+            <a:spLocks xmlns:a="http://schemas.openxmlformats.org/drawingml/2006/main" noGrp="1"/>
+          </p:cNvSpPr>
+          <p:nvPr/>
+        </p:nvSpPr>
+        <p:spPr>
+          <a:xfrm xmlns:a="http://schemas.openxmlformats.org/drawingml/2006/main">
             <a:off x="9077325" y="5048250"/>
             <a:ext cx="2295525" cy="895350"/>
           </a:xfrm>
@@ -2367,7 +2367,7 @@
           <a:lstStyle xmlns:a="http://schemas.openxmlformats.org/drawingml/2006/main"/>
           <a:p xmlns:a="http://schemas.openxmlformats.org/drawingml/2006/main">
             <a:pPr algn="l">
-              <a:defRPr sz="1125" b="0">
+              <a:defRPr sz="1200" b="0">
                 <a:solidFill>
                   <a:srgbClr val="5B463A"/>
                 </a:solidFill>
@@ -2377,7 +2377,7 @@
               </a:defRPr>
             </a:pPr>
             <a:r>
-              <a:rPr sz="1125" b="0">
+              <a:rPr sz="1200" b="0">
                 <a:solidFill>
                   <a:srgbClr val="5B463A"/>
                 </a:solidFill>
@@ -2393,7 +2393,7 @@
     </p:spTree>
     <p:extLst>
       <p:ext uri="{BB962C8B-B14F-4D97-AF65-F5344CB8AC3E}">
-        <p14:creationId xmlns:p14="http://schemas.microsoft.com/office/powerpoint/2010/main" val="1080738313"/>
+        <p14:creationId xmlns:p14="http://schemas.microsoft.com/office/powerpoint/2010/main" val="1522257526"/>
       </p:ext>
     </p:extLst>
   </p:cSld>
